--- a/output/GroupedBoxplot.pptx
+++ b/output/GroupedBoxplot.pptx
@@ -136,8 +136,8 @@
         </p:nvSpPr>
         <p:spPr>
           <a:xfrm>
-            <a:off y="228600" x="975995"/>
-            <a:ext cy="5400675" cx="7191375"/>
+            <a:off y="228600" x="972185"/>
+            <a:ext cy="5401056" cx="7199376"/>
           </a:xfrm>
         </p:spPr>
       </p:sp>
@@ -161,10 +161,10 @@
           <a:bodyPr/>
           <a:lstStyle/>
           <a:p>
-            <a:fld id="{6BAD40F7-DFE5-C44C-A247-5F4781D8BFC5}" type="datetimeFigureOut">
+            <a:fld id="{24740BCC-5A9A-3246-9078-0EA7D7AAF46F}" type="datetimeFigureOut">
               <a:rPr lang="en-GB" smtClean="0"/>
               <a:pPr/>
-              <a:t>03/22/26</a:t>
+              <a:t>03/26/26</a:t>
             </a:fld>
             <a:endParaRPr lang="en-GB"/>
           </a:p>
@@ -190,7 +190,7 @@
           <a:bodyPr/>
           <a:lstStyle/>
           <a:p>
-            <a:fld id="{1C1D2F1C-6E5C-A342-9095-CBCF53DB9D05}" type="slidenum">
+            <a:fld id="{BDD733E4-5224-B54D-B3FC-A2981890401F}" type="slidenum">
               <a:rPr lang="en-GB" smtClean="0"/>
               <a:pPr/>
               <a:t>‹#›</a:t>
@@ -2468,10 +2468,10 @@
             </a:lvl1pPr>
           </a:lstStyle>
           <a:p>
-            <a:fld id="{6BAD40F7-DFE5-C44C-A247-5F4781D8BFC5}" type="datetimeFigureOut">
+            <a:fld id="{24740BCC-5A9A-3246-9078-0EA7D7AAF46F}" type="datetimeFigureOut">
               <a:rPr lang="en-GB" smtClean="0"/>
               <a:pPr/>
-              <a:t>03/22/26</a:t>
+              <a:t>03/26/26</a:t>
             </a:fld>
             <a:endParaRPr lang="en-GB"/>
           </a:p>
@@ -2549,7 +2549,7 @@
             </a:lvl1pPr>
           </a:lstStyle>
           <a:p>
-            <a:fld id="{1C1D2F1C-6E5C-A342-9095-CBCF53DB9D05}" type="slidenum">
+            <a:fld id="{BDD733E4-5224-B54D-B3FC-A2981890401F}" type="slidenum">
               <a:rPr lang="en-GB" smtClean="0"/>
               <a:pPr/>
               <a:t>‹#›</a:t>
@@ -2928,31 +2928,22 @@
       </p:grpSpPr>
       <p:pic>
         <p:nvPicPr>
-          <p:cNvPr id="2" title="The SGPlot Procedure" name="SGPlot1.svg" descr="The SGPlot Procedure"/>
+          <p:cNvPr id="2" title="The SGPlot Procedure" name="Age_BMI2.png" descr="The SGPlot Procedure"/>
           <p:cNvPicPr>
             <a:picLocks noChangeAspect="1"/>
           </p:cNvPicPr>
           <p:nvPr/>
         </p:nvPicPr>
         <p:blipFill rotWithShape="1">
-          <a:blip r:embed="rId3">
-            <a:extLst>
-              <a:ext uri="{28A0092B-C50C-407E-A947-70E740481C1C}">
-                <a14:useLocalDpi xmlns:a14="http://schemas.microsoft.com/office/drawing/2010/main" val="0"/>
-              </a:ext>
-              <a:ext uri="{96DAC541-7B7A-43D3-8B79-37D633B846F1}">
-                <asvg:svgBlip xmlns:asvg="http://schemas.microsoft.com/office/drawing/2016/SVG/main" r:embed="rId2"/>
-              </a:ext>
-            </a:extLst>
-          </a:blip>
+          <a:blip r:embed="rId2"/>
           <a:stretch>
             <a:fillRect/>
           </a:stretch>
         </p:blipFill>
         <p:spPr>
           <a:xfrm>
-            <a:off y="228600" x="975995"/>
-            <a:ext cy="5400675" cx="7191375"/>
+            <a:off y="228600" x="972185"/>
+            <a:ext cy="5401056" cx="7199376"/>
           </a:xfrm>
           <a:prstGeom prst="rect">
             <a:avLst/>
@@ -2980,14 +2971,14 @@
           <a:lstStyle/>
           <a:p>
             <a:pPr algn="l"/>
-            <a:fld id="{6BAD40F7-DFE5-C44C-A247-5F4781D8BFC5}" type="datetime1">
+            <a:fld id="{24740BCC-5A9A-3246-9078-0EA7D7AAF46F}" type="datetime1">
               <a:rPr smtClean="0" dirty="0" sz="900" lang="en-GB">
                 <a:solidFill>
                   <a:schemeClr val="tx1"/>
                 </a:solidFill>
                 <a:latin typeface="+mn-lt"/>
               </a:rPr>
-              <a:t>Sunday, March 22, 2026</a:t>
+              <a:t>Thursday, March 26, 2026</a:t>
             </a:fld>
             <a:endParaRPr lang="en-GB" dirty="0">
               <a:solidFill>
@@ -3019,7 +3010,7 @@
           <a:lstStyle/>
           <a:p>
             <a:pPr algn="r"/>
-            <a:fld id="{1C1D2F1C-6E5C-A342-9095-CBCF53DB9D05}" type="slidenum">
+            <a:fld id="{BDD733E4-5224-B54D-B3FC-A2981890401F}" type="slidenum">
               <a:rPr smtClean="0" dirty="0" sz="900" lang="en-GB">
                 <a:solidFill>
                   <a:schemeClr val="tx1"/>

--- a/output/GroupedBoxplot.pptx
+++ b/output/GroupedBoxplot.pptx
@@ -161,10 +161,10 @@
           <a:bodyPr/>
           <a:lstStyle/>
           <a:p>
-            <a:fld id="{24740BCC-5A9A-3246-9078-0EA7D7AAF46F}" type="datetimeFigureOut">
+            <a:fld id="{8058BADF-9151-4C49-8CCC-718F5C420EA9}" type="datetimeFigureOut">
               <a:rPr lang="en-GB" smtClean="0"/>
               <a:pPr/>
-              <a:t>03/26/26</a:t>
+              <a:t>03/27/26</a:t>
             </a:fld>
             <a:endParaRPr lang="en-GB"/>
           </a:p>
@@ -190,7 +190,7 @@
           <a:bodyPr/>
           <a:lstStyle/>
           <a:p>
-            <a:fld id="{BDD733E4-5224-B54D-B3FC-A2981890401F}" type="slidenum">
+            <a:fld id="{246219B7-F4C5-C046-8158-E77707A71B77}" type="slidenum">
               <a:rPr lang="en-GB" smtClean="0"/>
               <a:pPr/>
               <a:t>‹#›</a:t>
@@ -2468,10 +2468,10 @@
             </a:lvl1pPr>
           </a:lstStyle>
           <a:p>
-            <a:fld id="{24740BCC-5A9A-3246-9078-0EA7D7AAF46F}" type="datetimeFigureOut">
+            <a:fld id="{8058BADF-9151-4C49-8CCC-718F5C420EA9}" type="datetimeFigureOut">
               <a:rPr lang="en-GB" smtClean="0"/>
               <a:pPr/>
-              <a:t>03/26/26</a:t>
+              <a:t>03/27/26</a:t>
             </a:fld>
             <a:endParaRPr lang="en-GB"/>
           </a:p>
@@ -2549,7 +2549,7 @@
             </a:lvl1pPr>
           </a:lstStyle>
           <a:p>
-            <a:fld id="{BDD733E4-5224-B54D-B3FC-A2981890401F}" type="slidenum">
+            <a:fld id="{246219B7-F4C5-C046-8158-E77707A71B77}" type="slidenum">
               <a:rPr lang="en-GB" smtClean="0"/>
               <a:pPr/>
               <a:t>‹#›</a:t>
@@ -2971,14 +2971,14 @@
           <a:lstStyle/>
           <a:p>
             <a:pPr algn="l"/>
-            <a:fld id="{24740BCC-5A9A-3246-9078-0EA7D7AAF46F}" type="datetime1">
+            <a:fld id="{8058BADF-9151-4C49-8CCC-718F5C420EA9}" type="datetime1">
               <a:rPr smtClean="0" dirty="0" sz="900" lang="en-GB">
                 <a:solidFill>
                   <a:schemeClr val="tx1"/>
                 </a:solidFill>
                 <a:latin typeface="+mn-lt"/>
               </a:rPr>
-              <a:t>Thursday, March 26, 2026</a:t>
+              <a:t>Friday, March 27, 2026</a:t>
             </a:fld>
             <a:endParaRPr lang="en-GB" dirty="0">
               <a:solidFill>
@@ -3010,7 +3010,7 @@
           <a:lstStyle/>
           <a:p>
             <a:pPr algn="r"/>
-            <a:fld id="{BDD733E4-5224-B54D-B3FC-A2981890401F}" type="slidenum">
+            <a:fld id="{246219B7-F4C5-C046-8158-E77707A71B77}" type="slidenum">
               <a:rPr smtClean="0" dirty="0" sz="900" lang="en-GB">
                 <a:solidFill>
                   <a:schemeClr val="tx1"/>
